--- a/deliverables/project-initiation/05-工业路由器装配MES-方案汇报.pptx
+++ b/deliverables/project-initiation/05-工业路由器装配MES-方案汇报.pptx
@@ -1604,7 +1604,7 @@
                 <a:ea typeface="Microsoft YaHei"/>
                 <a:cs typeface="Microsoft YaHei"/>
               </a:rPr>
-              <a:t>高级售前工程师  李文韬</a:t>
+              <a:t>高级售前工程师  李先生</a:t>
             </a:r>
           </a:p>
         </p:txBody>
@@ -17699,7 +17699,7 @@
                 <a:ea typeface="Microsoft YaHei"/>
                 <a:cs typeface="Microsoft YaHei"/>
               </a:rPr>
-              <a:t>高级售前工程师  李文韬</a:t>
+              <a:t>高级售前工程师  李先生</a:t>
             </a:r>
           </a:p>
         </p:txBody>
